--- a/Shablon2.pptx
+++ b/Shablon2.pptx
@@ -5,16 +5,18 @@
     <p:sldMasterId id="2147483648" r:id="rId1"/>
   </p:sldMasterIdLst>
   <p:notesMasterIdLst>
-    <p:notesMasterId r:id="rId9"/>
+    <p:notesMasterId r:id="rId11"/>
   </p:notesMasterIdLst>
   <p:sldIdLst>
     <p:sldId id="256" r:id="rId2"/>
     <p:sldId id="261" r:id="rId3"/>
     <p:sldId id="257" r:id="rId4"/>
     <p:sldId id="258" r:id="rId5"/>
-    <p:sldId id="263" r:id="rId6"/>
-    <p:sldId id="262" r:id="rId7"/>
-    <p:sldId id="260" r:id="rId8"/>
+    <p:sldId id="265" r:id="rId6"/>
+    <p:sldId id="264" r:id="rId7"/>
+    <p:sldId id="263" r:id="rId8"/>
+    <p:sldId id="262" r:id="rId9"/>
+    <p:sldId id="260" r:id="rId10"/>
   </p:sldIdLst>
   <p:sldSz cx="12192000" cy="6858000"/>
   <p:notesSz cx="12192000" cy="6858000"/>
@@ -4065,7 +4067,7 @@
                   <a:schemeClr val="bg1"/>
                 </a:solidFill>
               </a:rPr>
-              <a:t>Цели и задачи</a:t>
+              <a:t>Цель и задачи</a:t>
             </a:r>
           </a:p>
         </p:txBody>
@@ -5019,7 +5021,7 @@
                         <a:buNone/>
                       </a:pPr>
                       <a:r>
-                        <a:rPr lang="ru-RU" sz="1400"/>
+                        <a:rPr lang="ru-RU" sz="1400" dirty="0"/>
                         <a:t>Критерий</a:t>
                       </a:r>
                     </a:p>
@@ -5049,9 +5051,10 @@
                         <a:buNone/>
                       </a:pPr>
                       <a:r>
-                        <a:rPr lang="ru-RU" sz="2400"/>
+                        <a:rPr lang="ru-RU" sz="2400" dirty="0" err="1"/>
                         <a:t>АвтоДилер</a:t>
                       </a:r>
+                      <a:endParaRPr lang="ru-RU" sz="2400" dirty="0"/>
                     </a:p>
                   </a:txBody>
                   <a:tcPr marL="58802" marR="58802" marT="29401" marB="29401" anchor="ctr">
@@ -5079,7 +5082,7 @@
                         <a:buNone/>
                       </a:pPr>
                       <a:r>
-                        <a:rPr lang="ru-RU" sz="2400"/>
+                        <a:rPr lang="ru-RU" sz="2400" dirty="0"/>
                         <a:t>1С:Автосервис</a:t>
                       </a:r>
                     </a:p>
@@ -5147,7 +5150,7 @@
                         <a:buNone/>
                       </a:pPr>
                       <a:r>
-                        <a:rPr lang="ru-RU" sz="1400"/>
+                        <a:rPr lang="ru-RU" sz="1400" dirty="0"/>
                         <a:t>Учёт клиентов</a:t>
                       </a:r>
                     </a:p>
@@ -5211,7 +5214,7 @@
                         <a:buNone/>
                       </a:pPr>
                       <a:r>
-                        <a:rPr lang="ru-RU" sz="1400">
+                        <a:rPr lang="ru-RU" sz="1400" dirty="0">
                           <a:solidFill>
                             <a:schemeClr val="accent6"/>
                           </a:solidFill>
@@ -5245,7 +5248,7 @@
                         <a:buNone/>
                       </a:pPr>
                       <a:r>
-                        <a:rPr lang="ru-RU" sz="1400">
+                        <a:rPr lang="ru-RU" sz="1400" dirty="0">
                           <a:solidFill>
                             <a:schemeClr val="accent6"/>
                           </a:solidFill>
@@ -5286,7 +5289,7 @@
                         <a:buNone/>
                       </a:pPr>
                       <a:r>
-                        <a:rPr lang="ru-RU" sz="1400"/>
+                        <a:rPr lang="ru-RU" sz="1400" dirty="0"/>
                         <a:t>Учёт автомобилей</a:t>
                       </a:r>
                     </a:p>
@@ -5316,7 +5319,7 @@
                         <a:buNone/>
                       </a:pPr>
                       <a:r>
-                        <a:rPr lang="ru-RU" sz="1400">
+                        <a:rPr lang="ru-RU" sz="1400" dirty="0">
                           <a:solidFill>
                             <a:schemeClr val="accent6"/>
                           </a:solidFill>
@@ -5455,7 +5458,7 @@
                         <a:buNone/>
                       </a:pPr>
                       <a:r>
-                        <a:rPr lang="ru-RU" sz="1400">
+                        <a:rPr lang="ru-RU" sz="1400" dirty="0">
                           <a:solidFill>
                             <a:schemeClr val="accent6"/>
                           </a:solidFill>
@@ -6454,7 +6457,7 @@
                         <a:buNone/>
                       </a:pPr>
                       <a:r>
-                        <a:rPr lang="ru-RU" sz="1400"/>
+                        <a:rPr lang="ru-RU" sz="1400" dirty="0"/>
                         <a:t>Частично</a:t>
                       </a:r>
                     </a:p>
@@ -7207,6 +7210,444 @@
         <p:cNvPr id="1" name="">
           <a:extLst>
             <a:ext uri="{FF2B5EF4-FFF2-40B4-BE49-F238E27FC236}">
+              <a16:creationId xmlns:a16="http://schemas.microsoft.com/office/drawing/2014/main" id="{7030F456-7DFE-DCBC-975F-4C4A3ADF464B}"/>
+            </a:ext>
+          </a:extLst>
+        </p:cNvPr>
+        <p:cNvGrpSpPr/>
+        <p:nvPr/>
+      </p:nvGrpSpPr>
+      <p:grpSpPr bwMode="auto">
+        <a:xfrm>
+          <a:off x="0" y="0"/>
+          <a:ext cx="0" cy="0"/>
+          <a:chOff x="0" y="0"/>
+          <a:chExt cx="0" cy="0"/>
+        </a:xfrm>
+      </p:grpSpPr>
+      <p:sp>
+        <p:nvSpPr>
+          <p:cNvPr id="7" name="Номер слайда 6">
+            <a:extLst>
+              <a:ext uri="{FF2B5EF4-FFF2-40B4-BE49-F238E27FC236}">
+                <a16:creationId xmlns:a16="http://schemas.microsoft.com/office/drawing/2014/main" id="{70132270-C2BF-8741-98A0-1389A603AA93}"/>
+              </a:ext>
+            </a:extLst>
+          </p:cNvPr>
+          <p:cNvSpPr>
+            <a:spLocks noGrp="1"/>
+          </p:cNvSpPr>
+          <p:nvPr>
+            <p:ph type="sldNum" sz="quarter" idx="12"/>
+          </p:nvPr>
+        </p:nvSpPr>
+        <p:spPr>
+          <a:xfrm>
+            <a:off x="9259957" y="6492875"/>
+            <a:ext cx="2743200" cy="365125"/>
+          </a:xfrm>
+        </p:spPr>
+        <p:txBody>
+          <a:bodyPr/>
+          <a:lstStyle/>
+          <a:p>
+            <a:pPr>
+              <a:defRPr/>
+            </a:pPr>
+            <a:fld id="{D57F1E4F-1CFF-5643-939E-217C01CDF565}" type="slidenum">
+              <a:rPr lang="en-US" smtClean="0">
+                <a:solidFill>
+                  <a:schemeClr val="bg1"/>
+                </a:solidFill>
+              </a:rPr>
+              <a:t>5</a:t>
+            </a:fld>
+            <a:endParaRPr lang="en-US">
+              <a:solidFill>
+                <a:schemeClr val="bg1"/>
+              </a:solidFill>
+            </a:endParaRPr>
+          </a:p>
+        </p:txBody>
+      </p:sp>
+      <p:pic>
+        <p:nvPicPr>
+          <p:cNvPr id="2" name="Рисунок 1">
+            <a:extLst>
+              <a:ext uri="{FF2B5EF4-FFF2-40B4-BE49-F238E27FC236}">
+                <a16:creationId xmlns:a16="http://schemas.microsoft.com/office/drawing/2014/main" id="{496BB74A-7E3E-1B1D-0C2F-484AE8FB72D6}"/>
+              </a:ext>
+            </a:extLst>
+          </p:cNvPr>
+          <p:cNvPicPr>
+            <a:picLocks noChangeAspect="1"/>
+          </p:cNvPicPr>
+          <p:nvPr/>
+        </p:nvPicPr>
+        <p:blipFill>
+          <a:blip r:embed="rId2"/>
+          <a:stretch>
+            <a:fillRect/>
+          </a:stretch>
+        </p:blipFill>
+        <p:spPr>
+          <a:xfrm>
+            <a:off x="6096000" y="1055832"/>
+            <a:ext cx="4609074" cy="4746335"/>
+          </a:xfrm>
+          <a:prstGeom prst="rect">
+            <a:avLst/>
+          </a:prstGeom>
+        </p:spPr>
+      </p:pic>
+      <p:sp>
+        <p:nvSpPr>
+          <p:cNvPr id="4" name="TextBox 3">
+            <a:extLst>
+              <a:ext uri="{FF2B5EF4-FFF2-40B4-BE49-F238E27FC236}">
+                <a16:creationId xmlns:a16="http://schemas.microsoft.com/office/drawing/2014/main" id="{35B30AA9-0837-46F4-5296-5A08852A8271}"/>
+              </a:ext>
+            </a:extLst>
+          </p:cNvPr>
+          <p:cNvSpPr txBox="1"/>
+          <p:nvPr/>
+        </p:nvSpPr>
+        <p:spPr>
+          <a:xfrm>
+            <a:off x="1240168" y="2949879"/>
+            <a:ext cx="3876805" cy="1477328"/>
+          </a:xfrm>
+          <a:prstGeom prst="rect">
+            <a:avLst/>
+          </a:prstGeom>
+          <a:noFill/>
+        </p:spPr>
+        <p:txBody>
+          <a:bodyPr wrap="square" rtlCol="0">
+            <a:spAutoFit/>
+          </a:bodyPr>
+          <a:lstStyle/>
+          <a:p>
+            <a:r>
+              <a:rPr lang="ru-RU" dirty="0"/>
+              <a:t>Роли:</a:t>
+            </a:r>
+          </a:p>
+          <a:p>
+            <a:pPr marL="342900" indent="-342900">
+              <a:buAutoNum type="arabicPeriod"/>
+            </a:pPr>
+            <a:r>
+              <a:rPr lang="ru-RU" dirty="0"/>
+              <a:t>Владелец мастерской</a:t>
+            </a:r>
+          </a:p>
+          <a:p>
+            <a:pPr marL="342900" indent="-342900">
+              <a:buAutoNum type="arabicPeriod"/>
+            </a:pPr>
+            <a:r>
+              <a:rPr lang="ru-RU" dirty="0"/>
+              <a:t>Работник</a:t>
+            </a:r>
+          </a:p>
+          <a:p>
+            <a:pPr marL="342900" indent="-342900">
+              <a:buAutoNum type="arabicPeriod"/>
+            </a:pPr>
+            <a:r>
+              <a:rPr lang="ru-RU" dirty="0"/>
+              <a:t>Администратор</a:t>
+            </a:r>
+          </a:p>
+          <a:p>
+            <a:pPr marL="342900" indent="-342900">
+              <a:buAutoNum type="arabicPeriod"/>
+            </a:pPr>
+            <a:r>
+              <a:rPr lang="ru-RU" dirty="0"/>
+              <a:t>Пользователь</a:t>
+            </a:r>
+            <a:endParaRPr lang="en-US" dirty="0"/>
+          </a:p>
+        </p:txBody>
+      </p:sp>
+      <p:sp>
+        <p:nvSpPr>
+          <p:cNvPr id="6" name="Заголовок 5">
+            <a:extLst>
+              <a:ext uri="{FF2B5EF4-FFF2-40B4-BE49-F238E27FC236}">
+                <a16:creationId xmlns:a16="http://schemas.microsoft.com/office/drawing/2014/main" id="{8647373A-11AC-0844-99D6-9928DF88B3BC}"/>
+              </a:ext>
+            </a:extLst>
+          </p:cNvPr>
+          <p:cNvSpPr>
+            <a:spLocks noGrp="1"/>
+          </p:cNvSpPr>
+          <p:nvPr>
+            <p:ph type="title"/>
+          </p:nvPr>
+        </p:nvSpPr>
+        <p:spPr/>
+        <p:txBody>
+          <a:bodyPr/>
+          <a:lstStyle/>
+          <a:p>
+            <a:endParaRPr lang="en-US"/>
+          </a:p>
+        </p:txBody>
+      </p:sp>
+      <p:sp>
+        <p:nvSpPr>
+          <p:cNvPr id="8" name="Заголовок 2">
+            <a:extLst>
+              <a:ext uri="{FF2B5EF4-FFF2-40B4-BE49-F238E27FC236}">
+                <a16:creationId xmlns:a16="http://schemas.microsoft.com/office/drawing/2014/main" id="{752E2DB4-16D2-0E03-2738-86D3A24E589F}"/>
+              </a:ext>
+            </a:extLst>
+          </p:cNvPr>
+          <p:cNvSpPr txBox="1">
+            <a:spLocks/>
+          </p:cNvSpPr>
+          <p:nvPr/>
+        </p:nvSpPr>
+        <p:spPr bwMode="auto">
+          <a:xfrm>
+            <a:off x="1028239" y="0"/>
+            <a:ext cx="4300665" cy="867284"/>
+          </a:xfrm>
+          <a:prstGeom prst="rect">
+            <a:avLst/>
+          </a:prstGeom>
+        </p:spPr>
+        <p:txBody>
+          <a:bodyPr vert="horz" lIns="91440" tIns="45720" rIns="91440" bIns="45720" rtlCol="0" anchor="ctr">
+            <a:noAutofit/>
+          </a:bodyPr>
+          <a:lstStyle>
+            <a:lvl1pPr algn="l" defTabSz="914400">
+              <a:lnSpc>
+                <a:spcPct val="90000"/>
+              </a:lnSpc>
+              <a:spcBef>
+                <a:spcPts val="0"/>
+              </a:spcBef>
+              <a:buNone/>
+              <a:defRPr sz="4400">
+                <a:solidFill>
+                  <a:schemeClr val="tx1"/>
+                </a:solidFill>
+                <a:latin typeface="+mj-lt"/>
+                <a:ea typeface="+mj-ea"/>
+                <a:cs typeface="+mj-cs"/>
+              </a:defRPr>
+            </a:lvl1pPr>
+          </a:lstStyle>
+          <a:p>
+            <a:pPr>
+              <a:defRPr/>
+            </a:pPr>
+            <a:r>
+              <a:rPr lang="ru-RU" sz="2800" b="1">
+                <a:solidFill>
+                  <a:schemeClr val="bg1"/>
+                </a:solidFill>
+                <a:latin typeface="Verdana"/>
+                <a:ea typeface="Verdana"/>
+                <a:cs typeface="Times New Roman"/>
+              </a:rPr>
+              <a:t>Проектная часть</a:t>
+            </a:r>
+            <a:endParaRPr lang="ru-RU" sz="2800" dirty="0">
+              <a:solidFill>
+                <a:schemeClr val="bg1"/>
+              </a:solidFill>
+            </a:endParaRPr>
+          </a:p>
+        </p:txBody>
+      </p:sp>
+    </p:spTree>
+    <p:extLst>
+      <p:ext uri="{BB962C8B-B14F-4D97-AF65-F5344CB8AC3E}">
+        <p14:creationId xmlns:p14="http://schemas.microsoft.com/office/powerpoint/2010/main" val="518970791"/>
+      </p:ext>
+    </p:extLst>
+  </p:cSld>
+  <p:clrMapOvr>
+    <a:masterClrMapping/>
+  </p:clrMapOvr>
+</p:sld>
+</file>
+
+<file path=ppt/slides/slide6.xml><?xml version="1.0" encoding="utf-8"?>
+<p:sld xmlns:a="http://schemas.openxmlformats.org/drawingml/2006/main" xmlns:r="http://schemas.openxmlformats.org/officeDocument/2006/relationships" xmlns:p="http://schemas.openxmlformats.org/presentationml/2006/main" showMasterPhAnim="0">
+  <p:cSld>
+    <p:spTree>
+      <p:nvGrpSpPr>
+        <p:cNvPr id="1" name="">
+          <a:extLst>
+            <a:ext uri="{FF2B5EF4-FFF2-40B4-BE49-F238E27FC236}">
+              <a16:creationId xmlns:a16="http://schemas.microsoft.com/office/drawing/2014/main" id="{A29ADC84-D7D7-B5BD-CD2A-9F68E850A37D}"/>
+            </a:ext>
+          </a:extLst>
+        </p:cNvPr>
+        <p:cNvGrpSpPr/>
+        <p:nvPr/>
+      </p:nvGrpSpPr>
+      <p:grpSpPr bwMode="auto">
+        <a:xfrm>
+          <a:off x="0" y="0"/>
+          <a:ext cx="0" cy="0"/>
+          <a:chOff x="0" y="0"/>
+          <a:chExt cx="0" cy="0"/>
+        </a:xfrm>
+      </p:grpSpPr>
+      <p:sp>
+        <p:nvSpPr>
+          <p:cNvPr id="3" name="Заголовок 2">
+            <a:extLst>
+              <a:ext uri="{FF2B5EF4-FFF2-40B4-BE49-F238E27FC236}">
+                <a16:creationId xmlns:a16="http://schemas.microsoft.com/office/drawing/2014/main" id="{452EFC2E-E6F1-BCC1-5A68-F7BFE810F81E}"/>
+              </a:ext>
+            </a:extLst>
+          </p:cNvPr>
+          <p:cNvSpPr>
+            <a:spLocks noGrp="1"/>
+          </p:cNvSpPr>
+          <p:nvPr>
+            <p:ph type="title"/>
+          </p:nvPr>
+        </p:nvSpPr>
+        <p:spPr bwMode="auto">
+          <a:xfrm>
+            <a:off x="1028239" y="0"/>
+            <a:ext cx="4300665" cy="867284"/>
+          </a:xfrm>
+        </p:spPr>
+        <p:txBody>
+          <a:bodyPr>
+            <a:noAutofit/>
+          </a:bodyPr>
+          <a:lstStyle/>
+          <a:p>
+            <a:pPr>
+              <a:defRPr/>
+            </a:pPr>
+            <a:r>
+              <a:rPr lang="ru-RU" sz="2800" b="1" dirty="0">
+                <a:solidFill>
+                  <a:schemeClr val="bg1"/>
+                </a:solidFill>
+                <a:latin typeface="Verdana"/>
+                <a:ea typeface="Verdana"/>
+                <a:cs typeface="Times New Roman"/>
+              </a:rPr>
+              <a:t>Проектная часть</a:t>
+            </a:r>
+            <a:endParaRPr lang="ru-RU" sz="2800" dirty="0">
+              <a:solidFill>
+                <a:schemeClr val="bg1"/>
+              </a:solidFill>
+            </a:endParaRPr>
+          </a:p>
+        </p:txBody>
+      </p:sp>
+      <p:sp>
+        <p:nvSpPr>
+          <p:cNvPr id="7" name="Номер слайда 6">
+            <a:extLst>
+              <a:ext uri="{FF2B5EF4-FFF2-40B4-BE49-F238E27FC236}">
+                <a16:creationId xmlns:a16="http://schemas.microsoft.com/office/drawing/2014/main" id="{DB6C87BA-08A6-76E6-3A35-ADFF832FBB01}"/>
+              </a:ext>
+            </a:extLst>
+          </p:cNvPr>
+          <p:cNvSpPr>
+            <a:spLocks noGrp="1"/>
+          </p:cNvSpPr>
+          <p:nvPr>
+            <p:ph type="sldNum" sz="quarter" idx="12"/>
+          </p:nvPr>
+        </p:nvSpPr>
+        <p:spPr>
+          <a:xfrm>
+            <a:off x="9259957" y="6492875"/>
+            <a:ext cx="2743200" cy="365125"/>
+          </a:xfrm>
+        </p:spPr>
+        <p:txBody>
+          <a:bodyPr/>
+          <a:lstStyle/>
+          <a:p>
+            <a:pPr>
+              <a:defRPr/>
+            </a:pPr>
+            <a:fld id="{D57F1E4F-1CFF-5643-939E-217C01CDF565}" type="slidenum">
+              <a:rPr lang="en-US" smtClean="0">
+                <a:solidFill>
+                  <a:schemeClr val="bg1"/>
+                </a:solidFill>
+              </a:rPr>
+              <a:t>6</a:t>
+            </a:fld>
+            <a:endParaRPr lang="en-US">
+              <a:solidFill>
+                <a:schemeClr val="bg1"/>
+              </a:solidFill>
+            </a:endParaRPr>
+          </a:p>
+        </p:txBody>
+      </p:sp>
+      <p:pic>
+        <p:nvPicPr>
+          <p:cNvPr id="10" name="Рисунок 9">
+            <a:extLst>
+              <a:ext uri="{FF2B5EF4-FFF2-40B4-BE49-F238E27FC236}">
+                <a16:creationId xmlns:a16="http://schemas.microsoft.com/office/drawing/2014/main" id="{7DC2300F-C759-151E-41DF-E3B12BBDDDEC}"/>
+              </a:ext>
+            </a:extLst>
+          </p:cNvPr>
+          <p:cNvPicPr>
+            <a:picLocks noChangeAspect="1"/>
+          </p:cNvPicPr>
+          <p:nvPr/>
+        </p:nvPicPr>
+        <p:blipFill>
+          <a:blip r:embed="rId2"/>
+          <a:stretch>
+            <a:fillRect/>
+          </a:stretch>
+        </p:blipFill>
+        <p:spPr>
+          <a:xfrm>
+            <a:off x="2642705" y="1127436"/>
+            <a:ext cx="6906589" cy="5191850"/>
+          </a:xfrm>
+          <a:prstGeom prst="rect">
+            <a:avLst/>
+          </a:prstGeom>
+        </p:spPr>
+      </p:pic>
+    </p:spTree>
+    <p:extLst>
+      <p:ext uri="{BB962C8B-B14F-4D97-AF65-F5344CB8AC3E}">
+        <p14:creationId xmlns:p14="http://schemas.microsoft.com/office/powerpoint/2010/main" val="2462019453"/>
+      </p:ext>
+    </p:extLst>
+  </p:cSld>
+  <p:clrMapOvr>
+    <a:masterClrMapping/>
+  </p:clrMapOvr>
+</p:sld>
+</file>
+
+<file path=ppt/slides/slide7.xml><?xml version="1.0" encoding="utf-8"?>
+<p:sld xmlns:a="http://schemas.openxmlformats.org/drawingml/2006/main" xmlns:r="http://schemas.openxmlformats.org/officeDocument/2006/relationships" xmlns:p="http://schemas.openxmlformats.org/presentationml/2006/main" showMasterPhAnim="0">
+  <p:cSld>
+    <p:spTree>
+      <p:nvGrpSpPr>
+        <p:cNvPr id="1" name="">
+          <a:extLst>
+            <a:ext uri="{FF2B5EF4-FFF2-40B4-BE49-F238E27FC236}">
               <a16:creationId xmlns:a16="http://schemas.microsoft.com/office/drawing/2014/main" id="{41A10974-0FAE-4FC5-89DE-C842F4FCBEE2}"/>
             </a:ext>
           </a:extLst>
@@ -7307,7 +7748,7 @@
                   <a:schemeClr val="bg1"/>
                 </a:solidFill>
               </a:rPr>
-              <a:t>5</a:t>
+              <a:t>7</a:t>
             </a:fld>
             <a:endParaRPr lang="en-US">
               <a:solidFill>
@@ -7339,7 +7780,7 @@
         </p:blipFill>
         <p:spPr>
           <a:xfrm>
-            <a:off x="499101" y="2900288"/>
+            <a:off x="436471" y="1353323"/>
             <a:ext cx="4429743" cy="1057423"/>
           </a:xfrm>
           <a:prstGeom prst="rect">
@@ -7361,7 +7802,7 @@
         </p:nvSpPr>
         <p:spPr>
           <a:xfrm>
-            <a:off x="1346548" y="4081104"/>
+            <a:off x="1308970" y="2395654"/>
             <a:ext cx="4202482" cy="369332"/>
           </a:xfrm>
           <a:prstGeom prst="rect">
@@ -7509,6 +7950,36 @@
           </a:p>
         </p:txBody>
       </p:sp>
+      <p:pic>
+        <p:nvPicPr>
+          <p:cNvPr id="4" name="Рисунок 3">
+            <a:extLst>
+              <a:ext uri="{FF2B5EF4-FFF2-40B4-BE49-F238E27FC236}">
+                <a16:creationId xmlns:a16="http://schemas.microsoft.com/office/drawing/2014/main" id="{3761B733-C3B7-FEB3-372B-356AAADC423E}"/>
+              </a:ext>
+            </a:extLst>
+          </p:cNvPr>
+          <p:cNvPicPr>
+            <a:picLocks noChangeAspect="1"/>
+          </p:cNvPicPr>
+          <p:nvPr/>
+        </p:nvPicPr>
+        <p:blipFill>
+          <a:blip r:embed="rId6"/>
+          <a:stretch>
+            <a:fillRect/>
+          </a:stretch>
+        </p:blipFill>
+        <p:spPr>
+          <a:xfrm>
+            <a:off x="972792" y="3403415"/>
+            <a:ext cx="2928941" cy="2087679"/>
+          </a:xfrm>
+          <a:prstGeom prst="rect">
+            <a:avLst/>
+          </a:prstGeom>
+        </p:spPr>
+      </p:pic>
     </p:spTree>
     <p:extLst>
       <p:ext uri="{BB962C8B-B14F-4D97-AF65-F5344CB8AC3E}">
@@ -7522,7 +7993,7 @@
 </p:sld>
 </file>
 
-<file path=ppt/slides/slide6.xml><?xml version="1.0" encoding="utf-8"?>
+<file path=ppt/slides/slide8.xml><?xml version="1.0" encoding="utf-8"?>
 <p:sld xmlns:a="http://schemas.openxmlformats.org/drawingml/2006/main" xmlns:r="http://schemas.openxmlformats.org/officeDocument/2006/relationships" xmlns:p="http://schemas.openxmlformats.org/presentationml/2006/main" showMasterPhAnim="0">
   <p:cSld>
     <p:spTree>
@@ -7630,7 +8101,7 @@
                   <a:schemeClr val="bg1"/>
                 </a:solidFill>
               </a:rPr>
-              <a:t>6</a:t>
+              <a:t>8</a:t>
             </a:fld>
             <a:endParaRPr lang="en-US">
               <a:solidFill>
@@ -7654,8 +8125,8 @@
         </p:nvSpPr>
         <p:spPr>
           <a:xfrm>
-            <a:off x="955301" y="1745179"/>
-            <a:ext cx="6097044" cy="3693319"/>
+            <a:off x="1218346" y="2703083"/>
+            <a:ext cx="11163631" cy="2031325"/>
           </a:xfrm>
           <a:prstGeom prst="rect">
             <a:avLst/>
@@ -7667,16 +8138,6 @@
             <a:spAutoFit/>
           </a:bodyPr>
           <a:lstStyle/>
-          <a:p>
-            <a:pPr>
-              <a:buNone/>
-            </a:pPr>
-            <a:r>
-              <a:rPr lang="ru-RU" b="1" dirty="0"/>
-              <a:t>Заключение</a:t>
-            </a:r>
-            <a:endParaRPr lang="ru-RU" dirty="0"/>
-          </a:p>
           <a:p>
             <a:pPr>
               <a:buFont typeface="Arial" panose="020B0604020202020204" pitchFamily="34" charset="0"/>
@@ -7752,7 +8213,7 @@
 </p:sld>
 </file>
 
-<file path=ppt/slides/slide7.xml><?xml version="1.0" encoding="utf-8"?>
+<file path=ppt/slides/slide9.xml><?xml version="1.0" encoding="utf-8"?>
 <p:sld xmlns:a="http://schemas.openxmlformats.org/drawingml/2006/main" xmlns:r="http://schemas.openxmlformats.org/officeDocument/2006/relationships" xmlns:p="http://schemas.openxmlformats.org/presentationml/2006/main" showMasterPhAnim="0">
   <p:cSld>
     <p:bg>
